--- a/week02_ids/lab/overview.pptx
+++ b/week02_ids/lab/overview.pptx
@@ -259,7 +259,7 @@
           <a:p>
             <a:fld id="{0CFBD873-DBD0-4707-9DB4-789466B59EAA}" type="datetimeFigureOut">
               <a:rPr lang="en-US" smtClean="0"/>
-              <a:t>8/29/24</a:t>
+              <a:t>9/15/26</a:t>
             </a:fld>
             <a:endParaRPr lang="en-US"/>
           </a:p>
@@ -457,7 +457,7 @@
           <a:p>
             <a:fld id="{0CFBD873-DBD0-4707-9DB4-789466B59EAA}" type="datetimeFigureOut">
               <a:rPr lang="en-US" smtClean="0"/>
-              <a:t>8/29/24</a:t>
+              <a:t>9/15/26</a:t>
             </a:fld>
             <a:endParaRPr lang="en-US"/>
           </a:p>
@@ -665,7 +665,7 @@
           <a:p>
             <a:fld id="{0CFBD873-DBD0-4707-9DB4-789466B59EAA}" type="datetimeFigureOut">
               <a:rPr lang="en-US" smtClean="0"/>
-              <a:t>8/29/24</a:t>
+              <a:t>9/15/26</a:t>
             </a:fld>
             <a:endParaRPr lang="en-US"/>
           </a:p>
@@ -863,7 +863,7 @@
           <a:p>
             <a:fld id="{0CFBD873-DBD0-4707-9DB4-789466B59EAA}" type="datetimeFigureOut">
               <a:rPr lang="en-US" smtClean="0"/>
-              <a:t>8/29/24</a:t>
+              <a:t>9/15/26</a:t>
             </a:fld>
             <a:endParaRPr lang="en-US"/>
           </a:p>
@@ -1138,7 +1138,7 @@
           <a:p>
             <a:fld id="{0CFBD873-DBD0-4707-9DB4-789466B59EAA}" type="datetimeFigureOut">
               <a:rPr lang="en-US" smtClean="0"/>
-              <a:t>8/29/24</a:t>
+              <a:t>9/15/26</a:t>
             </a:fld>
             <a:endParaRPr lang="en-US"/>
           </a:p>
@@ -1403,7 +1403,7 @@
           <a:p>
             <a:fld id="{0CFBD873-DBD0-4707-9DB4-789466B59EAA}" type="datetimeFigureOut">
               <a:rPr lang="en-US" smtClean="0"/>
-              <a:t>8/29/24</a:t>
+              <a:t>9/15/26</a:t>
             </a:fld>
             <a:endParaRPr lang="en-US"/>
           </a:p>
@@ -1815,7 +1815,7 @@
           <a:p>
             <a:fld id="{0CFBD873-DBD0-4707-9DB4-789466B59EAA}" type="datetimeFigureOut">
               <a:rPr lang="en-US" smtClean="0"/>
-              <a:t>8/29/24</a:t>
+              <a:t>9/15/26</a:t>
             </a:fld>
             <a:endParaRPr lang="en-US"/>
           </a:p>
@@ -1956,7 +1956,7 @@
           <a:p>
             <a:fld id="{0CFBD873-DBD0-4707-9DB4-789466B59EAA}" type="datetimeFigureOut">
               <a:rPr lang="en-US" smtClean="0"/>
-              <a:t>8/29/24</a:t>
+              <a:t>9/15/26</a:t>
             </a:fld>
             <a:endParaRPr lang="en-US"/>
           </a:p>
@@ -2069,7 +2069,7 @@
           <a:p>
             <a:fld id="{0CFBD873-DBD0-4707-9DB4-789466B59EAA}" type="datetimeFigureOut">
               <a:rPr lang="en-US" smtClean="0"/>
-              <a:t>8/29/24</a:t>
+              <a:t>9/15/26</a:t>
             </a:fld>
             <a:endParaRPr lang="en-US"/>
           </a:p>
@@ -2380,7 +2380,7 @@
           <a:p>
             <a:fld id="{0CFBD873-DBD0-4707-9DB4-789466B59EAA}" type="datetimeFigureOut">
               <a:rPr lang="en-US" smtClean="0"/>
-              <a:t>8/29/24</a:t>
+              <a:t>9/15/26</a:t>
             </a:fld>
             <a:endParaRPr lang="en-US"/>
           </a:p>
@@ -2668,7 +2668,7 @@
           <a:p>
             <a:fld id="{0CFBD873-DBD0-4707-9DB4-789466B59EAA}" type="datetimeFigureOut">
               <a:rPr lang="en-US" smtClean="0"/>
-              <a:t>8/29/24</a:t>
+              <a:t>9/15/26</a:t>
             </a:fld>
             <a:endParaRPr lang="en-US"/>
           </a:p>
@@ -2909,7 +2909,7 @@
           <a:p>
             <a:fld id="{0CFBD873-DBD0-4707-9DB4-789466B59EAA}" type="datetimeFigureOut">
               <a:rPr lang="en-US" smtClean="0"/>
-              <a:t>8/29/24</a:t>
+              <a:t>9/15/26</a:t>
             </a:fld>
             <a:endParaRPr lang="en-US"/>
           </a:p>
@@ -3378,10 +3378,10 @@
       </p:sp>
       <p:pic>
         <p:nvPicPr>
-          <p:cNvPr id="5" name="Picture 4" descr="A diagram of a computer network&#10;&#10;Description automatically generated">
-            <a:extLst>
-              <a:ext uri="{FF2B5EF4-FFF2-40B4-BE49-F238E27FC236}">
-                <a16:creationId xmlns:a16="http://schemas.microsoft.com/office/drawing/2014/main" id="{0606301D-A658-E94E-67EB-84B21AAB5364}"/>
+          <p:cNvPr id="4" name="Picture 3" descr="Lab">
+            <a:extLst>
+              <a:ext uri="{FF2B5EF4-FFF2-40B4-BE49-F238E27FC236}">
+                <a16:creationId xmlns:a16="http://schemas.microsoft.com/office/drawing/2014/main" id="{DEA84696-02CB-8FA2-4486-D20274A81E96}"/>
               </a:ext>
             </a:extLst>
           </p:cNvPr>
@@ -3391,21 +3391,15 @@
           <p:nvPr/>
         </p:nvPicPr>
         <p:blipFill>
-          <a:blip r:embed="rId2">
-            <a:extLst>
-              <a:ext uri="{28A0092B-C50C-407E-A947-70E740481C1C}">
-                <a14:useLocalDpi xmlns:a14="http://schemas.microsoft.com/office/drawing/2010/main" val="0"/>
-              </a:ext>
-            </a:extLst>
-          </a:blip>
+          <a:blip r:embed="rId2"/>
           <a:stretch>
             <a:fillRect/>
           </a:stretch>
         </p:blipFill>
         <p:spPr>
           <a:xfrm>
-            <a:off x="0" y="18578"/>
-            <a:ext cx="12501100" cy="6839421"/>
+            <a:off x="-1" y="0"/>
+            <a:ext cx="12111385" cy="6561574"/>
           </a:xfrm>
           <a:prstGeom prst="rect">
             <a:avLst/>
